--- a/public/fun/pack/pptx/familypro/가족소개프리미엄_48_3대가족_일렉트릭바이올렛.pptx
+++ b/public/fun/pack/pptx/familypro/가족소개프리미엄_48_3대가족_일렉트릭바이올렛.pptx
@@ -113,12 +113,12 @@
   <p:extLst>
     <p:ext uri="{521415D9-36F7-43E2-AB2F-B90AF26B5E84}">
       <p14:sectionLst xmlns:p14="http://schemas.microsoft.com/office/powerpoint/2010/main">
-        <p14:section name="시작" id="{81C6548A-D26B-4079-80B4-ACD6DDDB11AC}">
+        <p14:section name="시작" id="{CCC7D5C5-8782-4C8D-9E3D-A86C3D80FCE0}">
           <p14:sldIdLst>
             <p14:sldId id="256"/>
           </p14:sldIdLst>
         </p14:section>
-        <p14:section name="본문" id="{385A31B5-BEFD-48D8-B580-5B0FD87D8D4B}">
+        <p14:section name="본문" id="{F0C571A5-8D73-453E-BFA8-7B441EDEF1C9}">
           <p14:sldIdLst>
             <p14:sldId id="257"/>
             <p14:sldId id="258"/>
@@ -127,7 +127,7 @@
             <p14:sldId id="261"/>
           </p14:sldIdLst>
         </p14:section>
-        <p14:section name="마무리" id="{21A36A6C-539A-4709-91F6-314C4BD0ABC3}">
+        <p14:section name="마무리" id="{60992264-53E1-4D2E-B5CD-4EF11631A072}">
           <p14:sldIdLst>
             <p14:sldId id="262"/>
           </p14:sldIdLst>
@@ -1636,7 +1636,7 @@
             </a:lvl1pPr>
           </a:lstStyle>
           <a:p>
-            <a:fld id="{CE30A8E7-BE74-4299-84D0-456770D18032}" type="slidenum">
+            <a:fld id="{9241ABA2-BE84-44E1-8018-43CBEC1D96E1}" type="slidenum">
               <a:rPr lang="en-US"/>
               <a:t>‹#›</a:t>
             </a:fld>
@@ -3044,7 +3044,7 @@
             </a:lvl1pPr>
           </a:lstStyle>
           <a:p>
-            <a:fld id="{C1CEBD8A-8DBD-470A-A90B-321E3BB203F1}" type="slidenum">
+            <a:fld id="{C2BA2953-4988-4E7B-806D-41681099E79B}" type="slidenum">
               <a:rPr lang="en-US"/>
               <a:t>‹#›</a:t>
             </a:fld>
@@ -4334,7 +4334,7 @@
             </a:lvl1pPr>
           </a:lstStyle>
           <a:p>
-            <a:fld id="{4665328F-CB9A-4C15-AD20-7C6A64AAA58E}" type="slidenum">
+            <a:fld id="{116C8C7B-DCE8-4C68-9DD0-D38E4AD0BD99}" type="slidenum">
               <a:rPr lang="en-US"/>
               <a:t>‹#›</a:t>
             </a:fld>
@@ -5837,7 +5837,7 @@
           <a:p>
             <a:r>
               <a:rPr lang="ko-KR"/>
-              <a:t>눈 쌓인 장독대 옆 눈사람</a:t>
+              <a:t>하얀 장독대 옆에서 한 장</a:t>
             </a:r>
           </a:p>
         </p:txBody>
@@ -5859,7 +5859,7 @@
           <a:p>
             <a:r>
               <a:rPr lang="ko-KR"/>
-              <a:t>3대 가족 · 0000. 00. 00</a:t>
+              <a:t>3대 가족 · 날짜 입력</a:t>
             </a:r>
           </a:p>
         </p:txBody>
@@ -6352,7 +6352,7 @@
           <a:bodyPr/>
           <a:lstStyle/>
           <a:p>
-            <a:fld id="{E9AC213E-7A0C-43A7-AD75-BC13AE020E5F}" type="slidenum">
+            <a:fld id="{C8654EA5-3B76-4B51-AC5F-739245B257DD}" type="slidenum">
               <a:rPr lang="en-US"/>
               <a:t>‹#›</a:t>
             </a:fld>
@@ -7526,7 +7526,7 @@
           <a:bodyPr/>
           <a:lstStyle/>
           <a:p>
-            <a:fld id="{BA11472E-C828-4915-9811-F6312D6868F1}" type="slidenum">
+            <a:fld id="{44E6E9B9-9647-4E51-AA3B-83D10CA25BF3}" type="slidenum">
               <a:rPr lang="en-US"/>
               <a:t>‹#›</a:t>
             </a:fld>
@@ -8501,7 +8501,7 @@
           <a:bodyPr/>
           <a:lstStyle/>
           <a:p>
-            <a:fld id="{9AC7E7EE-118B-457B-B96B-C460A9ECB415}" type="slidenum">
+            <a:fld id="{2669864E-5F52-407F-BE49-5BB14E345E0F}" type="slidenum">
               <a:rPr lang="en-US"/>
               <a:t>‹#›</a:t>
             </a:fld>
@@ -9861,7 +9861,7 @@
           <a:bodyPr/>
           <a:lstStyle/>
           <a:p>
-            <a:fld id="{3201D524-23C4-40F0-AE74-67A51C178607}" type="slidenum">
+            <a:fld id="{AC8937AD-C8E1-45E4-9C04-D51BF18901B4}" type="slidenum">
               <a:rPr lang="en-US"/>
               <a:t>‹#›</a:t>
             </a:fld>
@@ -9949,7 +9949,7 @@
           <a:bodyPr/>
           <a:lstStyle/>
           <a:p>
-            <a:fld id="{F03928B3-E11D-4857-93D6-1F1BE41C38EB}" type="slidenum">
+            <a:fld id="{ADCD7A74-F09B-496D-BB17-BAF7F86F255A}" type="slidenum">
               <a:rPr lang="en-US"/>
               <a:t>‹#›</a:t>
             </a:fld>
